--- a/portal/public/downloads/KAIRALI-AI-METHOD-DECK-v15-PUBLIC-KIT.pptx
+++ b/portal/public/downloads/KAIRALI-AI-METHOD-DECK-v15-PUBLIC-KIT.pptx
@@ -2,38 +2,38 @@
 <file path=ppt/presentation.xml><?xml version="1.0" encoding="utf-8"?>
 <p:presentation xmlns:p="http://schemas.openxmlformats.org/presentationml/2006/main">
   <p:sldMasterIdLst>
-    <p:sldMasterId xmlns:r="http://schemas.openxmlformats.org/officeDocument/2006/relationships" id="2147483648" r:id="R47b77c9e33d048aa"/>
+    <p:sldMasterId xmlns:r="http://schemas.openxmlformats.org/officeDocument/2006/relationships" id="2147483648" r:id="R673ebc7d2baf4d6b"/>
   </p:sldMasterIdLst>
   <p:notesMasterIdLst>
-    <p:notesMasterId xmlns:r="http://schemas.openxmlformats.org/officeDocument/2006/relationships" r:id="Recf60a349021405e"/>
+    <p:notesMasterId xmlns:r="http://schemas.openxmlformats.org/officeDocument/2006/relationships" r:id="R4716162c0b224139"/>
   </p:notesMasterIdLst>
   <p:sldIdLst>
-    <p:sldId xmlns:r="http://schemas.openxmlformats.org/officeDocument/2006/relationships" id="256" r:id="Re61698d0bc354c56"/>
-    <p:sldId xmlns:r="http://schemas.openxmlformats.org/officeDocument/2006/relationships" id="257" r:id="R8140721b61634e9c"/>
-    <p:sldId xmlns:r="http://schemas.openxmlformats.org/officeDocument/2006/relationships" id="258" r:id="R65f4f0cad04c4901"/>
-    <p:sldId xmlns:r="http://schemas.openxmlformats.org/officeDocument/2006/relationships" id="259" r:id="R3c0f2b2d76004eb6"/>
-    <p:sldId xmlns:r="http://schemas.openxmlformats.org/officeDocument/2006/relationships" id="260" r:id="Ref386d77dfac4834"/>
-    <p:sldId xmlns:r="http://schemas.openxmlformats.org/officeDocument/2006/relationships" id="261" r:id="Rc46df60f29594964"/>
-    <p:sldId xmlns:r="http://schemas.openxmlformats.org/officeDocument/2006/relationships" id="262" r:id="Rec85608a81234533"/>
-    <p:sldId xmlns:r="http://schemas.openxmlformats.org/officeDocument/2006/relationships" id="263" r:id="Rd972208c0705449f"/>
-    <p:sldId xmlns:r="http://schemas.openxmlformats.org/officeDocument/2006/relationships" id="264" r:id="R801de574cadd4278"/>
-    <p:sldId xmlns:r="http://schemas.openxmlformats.org/officeDocument/2006/relationships" id="265" r:id="R08126b075a944731"/>
-    <p:sldId xmlns:r="http://schemas.openxmlformats.org/officeDocument/2006/relationships" id="266" r:id="R25457a3896e44739"/>
-    <p:sldId xmlns:r="http://schemas.openxmlformats.org/officeDocument/2006/relationships" id="267" r:id="R15e3c7854a3e4b80"/>
-    <p:sldId xmlns:r="http://schemas.openxmlformats.org/officeDocument/2006/relationships" id="268" r:id="R55693fcd471642a2"/>
-    <p:sldId xmlns:r="http://schemas.openxmlformats.org/officeDocument/2006/relationships" id="269" r:id="R8b77cbe372994cbf"/>
-    <p:sldId xmlns:r="http://schemas.openxmlformats.org/officeDocument/2006/relationships" id="270" r:id="R55ea3d74f8214dc6"/>
-    <p:sldId xmlns:r="http://schemas.openxmlformats.org/officeDocument/2006/relationships" id="271" r:id="R408b5d34220446e7"/>
-    <p:sldId xmlns:r="http://schemas.openxmlformats.org/officeDocument/2006/relationships" id="272" r:id="R7ed01c9a0d31457c"/>
-    <p:sldId xmlns:r="http://schemas.openxmlformats.org/officeDocument/2006/relationships" id="273" r:id="R455cd9fbb4df4591"/>
-    <p:sldId xmlns:r="http://schemas.openxmlformats.org/officeDocument/2006/relationships" id="274" r:id="R5168d4266e934316"/>
-    <p:sldId xmlns:r="http://schemas.openxmlformats.org/officeDocument/2006/relationships" id="275" r:id="Rc30765515d9b4fe4"/>
-    <p:sldId xmlns:r="http://schemas.openxmlformats.org/officeDocument/2006/relationships" id="276" r:id="Rcc39614c40544a43"/>
-    <p:sldId xmlns:r="http://schemas.openxmlformats.org/officeDocument/2006/relationships" id="277" r:id="R6f71261130f84cdc"/>
-    <p:sldId xmlns:r="http://schemas.openxmlformats.org/officeDocument/2006/relationships" id="278" r:id="R39d69f9ecfcd4280"/>
-    <p:sldId xmlns:r="http://schemas.openxmlformats.org/officeDocument/2006/relationships" id="279" r:id="Rdf048c9d1a4147fc"/>
-    <p:sldId xmlns:r="http://schemas.openxmlformats.org/officeDocument/2006/relationships" id="280" r:id="R09e3d0b439514fd6"/>
-    <p:sldId xmlns:r="http://schemas.openxmlformats.org/officeDocument/2006/relationships" id="281" r:id="Reeb66da2c59342dc"/>
+    <p:sldId xmlns:r="http://schemas.openxmlformats.org/officeDocument/2006/relationships" id="256" r:id="R145651b2cc1f4c8f"/>
+    <p:sldId xmlns:r="http://schemas.openxmlformats.org/officeDocument/2006/relationships" id="257" r:id="R4ebcdca3cea6460e"/>
+    <p:sldId xmlns:r="http://schemas.openxmlformats.org/officeDocument/2006/relationships" id="258" r:id="R944f722fe7f546e2"/>
+    <p:sldId xmlns:r="http://schemas.openxmlformats.org/officeDocument/2006/relationships" id="259" r:id="R3ba558163bcd4050"/>
+    <p:sldId xmlns:r="http://schemas.openxmlformats.org/officeDocument/2006/relationships" id="260" r:id="Rc2384be0c85c4a23"/>
+    <p:sldId xmlns:r="http://schemas.openxmlformats.org/officeDocument/2006/relationships" id="261" r:id="R582e2eaccf4b4c05"/>
+    <p:sldId xmlns:r="http://schemas.openxmlformats.org/officeDocument/2006/relationships" id="262" r:id="Rd7b6953cabc24f1e"/>
+    <p:sldId xmlns:r="http://schemas.openxmlformats.org/officeDocument/2006/relationships" id="263" r:id="Rf23dfaff4b0b43a3"/>
+    <p:sldId xmlns:r="http://schemas.openxmlformats.org/officeDocument/2006/relationships" id="264" r:id="Rd19f00168ba34bcf"/>
+    <p:sldId xmlns:r="http://schemas.openxmlformats.org/officeDocument/2006/relationships" id="265" r:id="R5618d7391e53429d"/>
+    <p:sldId xmlns:r="http://schemas.openxmlformats.org/officeDocument/2006/relationships" id="266" r:id="Rc4f46e7821ec4c89"/>
+    <p:sldId xmlns:r="http://schemas.openxmlformats.org/officeDocument/2006/relationships" id="267" r:id="Rc340cf732ef34638"/>
+    <p:sldId xmlns:r="http://schemas.openxmlformats.org/officeDocument/2006/relationships" id="268" r:id="Rac1996790b9146b8"/>
+    <p:sldId xmlns:r="http://schemas.openxmlformats.org/officeDocument/2006/relationships" id="269" r:id="Ra53181836bcb4737"/>
+    <p:sldId xmlns:r="http://schemas.openxmlformats.org/officeDocument/2006/relationships" id="270" r:id="Rb20c18f380144fab"/>
+    <p:sldId xmlns:r="http://schemas.openxmlformats.org/officeDocument/2006/relationships" id="271" r:id="R2355fc78bc8e4f52"/>
+    <p:sldId xmlns:r="http://schemas.openxmlformats.org/officeDocument/2006/relationships" id="272" r:id="Rb15776795c834dd6"/>
+    <p:sldId xmlns:r="http://schemas.openxmlformats.org/officeDocument/2006/relationships" id="273" r:id="R05b8fbeddfbb4f4c"/>
+    <p:sldId xmlns:r="http://schemas.openxmlformats.org/officeDocument/2006/relationships" id="274" r:id="R96c92e76d8a4469c"/>
+    <p:sldId xmlns:r="http://schemas.openxmlformats.org/officeDocument/2006/relationships" id="275" r:id="R207a66057fc148d1"/>
+    <p:sldId xmlns:r="http://schemas.openxmlformats.org/officeDocument/2006/relationships" id="276" r:id="R794dcd30f4234b5f"/>
+    <p:sldId xmlns:r="http://schemas.openxmlformats.org/officeDocument/2006/relationships" id="277" r:id="Rf3d35e8bdcaf461c"/>
+    <p:sldId xmlns:r="http://schemas.openxmlformats.org/officeDocument/2006/relationships" id="278" r:id="R45604511af554c6d"/>
+    <p:sldId xmlns:r="http://schemas.openxmlformats.org/officeDocument/2006/relationships" id="279" r:id="R67ee1ee0dccc4512"/>
+    <p:sldId xmlns:r="http://schemas.openxmlformats.org/officeDocument/2006/relationships" id="280" r:id="Rd4157974d397425c"/>
+    <p:sldId xmlns:r="http://schemas.openxmlformats.org/officeDocument/2006/relationships" id="281" r:id="R76785e7034cf4866"/>
   </p:sldIdLst>
   <p:sldSz cx="12192000" cy="6858000"/>
   <p:notesSz cx="6858000" cy="9144000"/>
@@ -2207,7 +2207,7 @@
           <a:lstStyle xmlns:a="http://schemas.openxmlformats.org/drawingml/2006/main"/>
           <a:p xmlns:a="http://schemas.openxmlformats.org/drawingml/2006/main">
             <a:r>
-              <a:t>The CSV is the future-searchable metadata index. The Markdown summary records coverage and gives plain-language search examples. The cursor makes the task resumable without duplicates. TEST 25 stops after one batch and says the full Drive was not indexed. FULL DRIVE INDEX continues after every durable checkpoint until all connector-supported scopes have no next page; unsupported scopes remain explicit coverage gaps. No file content is opened and Drive is not changed.</a:t>
+              <a:t>The CSV is the future-searchable metadata index. The Markdown summary records coverage and gives plain-language search examples. The cursor makes the task resumable without duplicates. TEST 25 stops after one batch and says the full Drive was not indexed; it proves setup only and does not complete company homework. FULL DRIVE INDEX continues after every durable checkpoint until all connector-supported scopes have no next page; unsupported scopes remain explicit coverage gaps. No file content is opened and Drive is not changed.</a:t>
             </a:r>
             <a:endParaRPr/>
           </a:p>
@@ -2409,7 +2409,7 @@
           <a:lstStyle xmlns:a="http://schemas.openxmlformats.org/drawingml/2006/main"/>
           <a:p xmlns:a="http://schemas.openxmlformats.org/drawingml/2006/main">
             <a:r>
-              <a:t>Daily Email Triage and Drive Index are required; the Weekly LinkedIn Message Assistant is optional after both pass. Email asks for the employee's chosen local time and confirms the time zone, proves a read-only 25-message pilot, then activates one ruled daily importance brief. Drive offers TEST 25 or FULL DRIVE INDEX with the same hard batch cap and durable checkpoint.</a:t>
+              <a:t>The public kit makes all three starters available; it does not activate an employee's connector, schedule or permissions. Daily Email Triage and FULL DRIVE INDEX are required. TEST 25 proves Drive setup only and is not company-homework completion. Email becomes LIVE FOR ME only after the approved account, chosen time and time zone, read-only pilot, filing-mode ruling, automation and validator agree. Drive becomes LIVE FOR ME only after every connector-supported scope ends through checkpointed batches no larger than 25 and the CSV, summary, final cursor and validator agree.</a:t>
             </a:r>
             <a:endParaRPr/>
           </a:p>
@@ -2421,7 +2421,7 @@
           </a:p>
           <a:p xmlns:a="http://schemas.openxmlformats.org/drawingml/2006/main">
             <a:r>
-              <a:t>For optional LinkedIn, the employee chooses a Saturday local time and confirms the time zone. Close LinkedIn first. Start the local proof with @Computer and approve only the visible local project and current task. Keep Ask for approval; never choose Full access or Always allow. @Chrome is allowed only for a named non-LinkedIn public page. Before LinkedIn appears, Computer + Chrome stop and Codex shows YOUR TURN ON LINKEDIN. The employee manually checks Focused and Other, copies no more than 25 conversations, closes LinkedIn, returns to the local project and says BATCH READY. Codex separates routine READY TO SEND drafts from a stable numbered NEEDS YOUR DECISION queue, then stops control again. The employee manually pastes and sends approved replies and confirms each outcome. The scheduled job opens only the local project. The AI never inspects, clicks, types, reads, copies, pastes or sends on LinkedIn.</a:t>
+              <a:t>The Weekly LinkedIn Message Assistant is optional after both pass. If chosen, the employee confirms the Saturday time and time zone. Close LinkedIn first. Start the local proof with @Computer and approve only the visible local project and current task. Keep Ask for approval; never choose Full access or Always allow. @Chrome is allowed only for a named non-LinkedIn public page. Before LinkedIn appears, Computer + Chrome stop and Codex shows YOUR TURN ON LINKEDIN. The employee manually checks Focused and Other, copies no more than 25 conversations, closes LinkedIn, returns to the local project and says BATCH READY. Codex separates routine READY TO SEND drafts from the numbered NEEDS YOUR DECISION queue, then stops control again. The employee manually pastes and sends approved replies and confirms each outcome. The AI never inspects, clicks, types, reads, copies, pastes or sends on LinkedIn. If the worker is declined, record NOT ENABLED BY CHOICE.</a:t>
             </a:r>
             <a:endParaRPr/>
           </a:p>
@@ -2445,7 +2445,7 @@
           </a:p>
           <a:p xmlns:a="http://schemas.openxmlformats.org/drawingml/2006/main">
             <a:r>
-              <a:t>- Kairali repository: packages/kairali/homework/START-HERE.md</a:t>
+              <a:t>- Kairali repository: packages/kairali/homework/THREE-WORKER-GO-LIVE-CHECKLIST.md</a:t>
             </a:r>
             <a:endParaRPr/>
           </a:p>
@@ -3197,7 +3197,7 @@
   </p:cSld>
   <p:clrMap bg1="lt1" tx1="dk1" bg2="lt2" tx2="dk2" accent1="accent1" accent2="accent2" accent3="accent3" accent4="accent4" accent5="accent5" accent6="accent6" hlink="hlink" folHlink="folHlink"/>
   <p:sldLayoutIdLst>
-    <p:sldLayoutId xmlns:r="http://schemas.openxmlformats.org/officeDocument/2006/relationships" id="2147483649" r:id="Re0e5d023653c4f1c"/>
+    <p:sldLayoutId xmlns:r="http://schemas.openxmlformats.org/officeDocument/2006/relationships" id="2147483649" r:id="R9c67de73896c4941"/>
   </p:sldLayoutIdLst>
   <p:hf sldNum="0" hdr="0" ftr="0" dt="0"/>
   <p:txStyles>
@@ -4012,7 +4012,7 @@
                 <a:solidFill>
                   <a:srgbClr val="F2CF66"/>
                 </a:solidFill>
-                <a:hlinkClick xmlns:r="http://schemas.openxmlformats.org/officeDocument/2006/relationships" r:id="Rbdbb33bd0e9147cc"/>
+                <a:hlinkClick xmlns:r="http://schemas.openxmlformats.org/officeDocument/2006/relationships" r:id="R78ab73e29e6947e8"/>
               </a:rPr>
               <a:t>CLICK HERE TO OPEN THE VIDEO</a:t>
             </a:r>
@@ -4317,7 +4317,7 @@
           <p:nvPr/>
         </p:nvPicPr>
         <p:blipFill>
-          <a:blip xmlns:r="http://schemas.openxmlformats.org/officeDocument/2006/relationships" xmlns:a="http://schemas.openxmlformats.org/drawingml/2006/main" r:embed="R49822b5a8f5740da"/>
+          <a:blip xmlns:r="http://schemas.openxmlformats.org/officeDocument/2006/relationships" xmlns:a="http://schemas.openxmlformats.org/drawingml/2006/main" r:embed="R25655721554347bd"/>
           <a:stretch xmlns:a="http://schemas.openxmlformats.org/drawingml/2006/main">
             <a:fillRect l="0" t="0" r="0" b="0"/>
           </a:stretch>
@@ -4759,7 +4759,7 @@
           <p:nvPr/>
         </p:nvPicPr>
         <p:blipFill>
-          <a:blip xmlns:r="http://schemas.openxmlformats.org/officeDocument/2006/relationships" xmlns:a="http://schemas.openxmlformats.org/drawingml/2006/main" r:embed="R04c9d576840a46d1"/>
+          <a:blip xmlns:r="http://schemas.openxmlformats.org/officeDocument/2006/relationships" xmlns:a="http://schemas.openxmlformats.org/drawingml/2006/main" r:embed="Ra199caafb7074778"/>
           <a:stretch xmlns:a="http://schemas.openxmlformats.org/drawingml/2006/main">
             <a:fillRect l="0" t="0" r="0" b="0"/>
           </a:stretch>
@@ -4885,7 +4885,7 @@
                 <a:solidFill>
                   <a:srgbClr val="F2CF66"/>
                 </a:solidFill>
-                <a:hlinkClick xmlns:r="http://schemas.openxmlformats.org/officeDocument/2006/relationships" r:id="R9a420e46b99f4190"/>
+                <a:hlinkClick xmlns:r="http://schemas.openxmlformats.org/officeDocument/2006/relationships" r:id="Rfa2e8957c2754329"/>
               </a:rPr>
               <a:t>PLAY THE 60-SECOND DEMONSTRATION</a:t>
             </a:r>
@@ -5190,7 +5190,7 @@
           <p:nvPr/>
         </p:nvPicPr>
         <p:blipFill>
-          <a:blip xmlns:r="http://schemas.openxmlformats.org/officeDocument/2006/relationships" xmlns:a="http://schemas.openxmlformats.org/drawingml/2006/main" r:embed="R759b4f7b76734155"/>
+          <a:blip xmlns:r="http://schemas.openxmlformats.org/officeDocument/2006/relationships" xmlns:a="http://schemas.openxmlformats.org/drawingml/2006/main" r:embed="R46797a0a74e543af"/>
           <a:stretch xmlns:a="http://schemas.openxmlformats.org/drawingml/2006/main">
             <a:fillRect l="0" t="0" r="0" b="0"/>
           </a:stretch>
@@ -7038,7 +7038,7 @@
           <p:nvPr/>
         </p:nvPicPr>
         <p:blipFill>
-          <a:blip xmlns:r="http://schemas.openxmlformats.org/officeDocument/2006/relationships" xmlns:a="http://schemas.openxmlformats.org/drawingml/2006/main" r:embed="R1a7f68fc03034a09"/>
+          <a:blip xmlns:r="http://schemas.openxmlformats.org/officeDocument/2006/relationships" xmlns:a="http://schemas.openxmlformats.org/drawingml/2006/main" r:embed="R166d661691124b88"/>
           <a:stretch xmlns:a="http://schemas.openxmlformats.org/drawingml/2006/main">
             <a:fillRect l="0" t="0" r="0" b="0"/>
           </a:stretch>
@@ -7216,7 +7216,7 @@
           <p:nvPr/>
         </p:nvPicPr>
         <p:blipFill>
-          <a:blip xmlns:r="http://schemas.openxmlformats.org/officeDocument/2006/relationships" xmlns:a="http://schemas.openxmlformats.org/drawingml/2006/main" r:embed="R492e58083d5b4621"/>
+          <a:blip xmlns:r="http://schemas.openxmlformats.org/officeDocument/2006/relationships" xmlns:a="http://schemas.openxmlformats.org/drawingml/2006/main" r:embed="Rc32f4555596544be"/>
           <a:stretch xmlns:a="http://schemas.openxmlformats.org/drawingml/2006/main">
             <a:fillRect l="0" t="0" r="0" b="0"/>
           </a:stretch>
@@ -7394,7 +7394,7 @@
           <p:nvPr/>
         </p:nvPicPr>
         <p:blipFill>
-          <a:blip xmlns:r="http://schemas.openxmlformats.org/officeDocument/2006/relationships" xmlns:a="http://schemas.openxmlformats.org/drawingml/2006/main" r:embed="Ra9131a3040184929"/>
+          <a:blip xmlns:r="http://schemas.openxmlformats.org/officeDocument/2006/relationships" xmlns:a="http://schemas.openxmlformats.org/drawingml/2006/main" r:embed="R4e554434a0094118"/>
           <a:stretch xmlns:a="http://schemas.openxmlformats.org/drawingml/2006/main">
             <a:fillRect l="0" t="0" r="0" b="0"/>
           </a:stretch>
@@ -9117,7 +9117,7 @@
           <p:nvPr/>
         </p:nvPicPr>
         <p:blipFill>
-          <a:blip xmlns:r="http://schemas.openxmlformats.org/officeDocument/2006/relationships" xmlns:a="http://schemas.openxmlformats.org/drawingml/2006/main" r:embed="R1f77e7d53a23413b"/>
+          <a:blip xmlns:r="http://schemas.openxmlformats.org/officeDocument/2006/relationships" xmlns:a="http://schemas.openxmlformats.org/drawingml/2006/main" r:embed="R1cb2f6def9684c4e"/>
           <a:stretch xmlns:a="http://schemas.openxmlformats.org/drawingml/2006/main">
             <a:fillRect l="0" t="0" r="0" b="0"/>
           </a:stretch>
@@ -10912,7 +10912,7 @@
           <p:nvPr/>
         </p:nvPicPr>
         <p:blipFill>
-          <a:blip xmlns:r="http://schemas.openxmlformats.org/officeDocument/2006/relationships" xmlns:a="http://schemas.openxmlformats.org/drawingml/2006/main" r:embed="R3dc2997749cf43b5"/>
+          <a:blip xmlns:r="http://schemas.openxmlformats.org/officeDocument/2006/relationships" xmlns:a="http://schemas.openxmlformats.org/drawingml/2006/main" r:embed="R0a788c0faafe46fd"/>
           <a:stretch xmlns:a="http://schemas.openxmlformats.org/drawingml/2006/main">
             <a:fillRect l="0" t="0" r="0" b="0"/>
           </a:stretch>
@@ -11828,7 +11828,7 @@
           <p:nvPr/>
         </p:nvPicPr>
         <p:blipFill>
-          <a:blip xmlns:r="http://schemas.openxmlformats.org/officeDocument/2006/relationships" xmlns:a="http://schemas.openxmlformats.org/drawingml/2006/main" r:embed="R3415fb2e37214e67"/>
+          <a:blip xmlns:r="http://schemas.openxmlformats.org/officeDocument/2006/relationships" xmlns:a="http://schemas.openxmlformats.org/drawingml/2006/main" r:embed="R91d47a6d4f494eb4"/>
           <a:stretch xmlns:a="http://schemas.openxmlformats.org/drawingml/2006/main">
             <a:fillRect l="0" t="0" r="0" b="0"/>
           </a:stretch>
@@ -13878,7 +13878,7 @@
           <p:nvPr/>
         </p:nvPicPr>
         <p:blipFill>
-          <a:blip xmlns:r="http://schemas.openxmlformats.org/officeDocument/2006/relationships" xmlns:a="http://schemas.openxmlformats.org/drawingml/2006/main" r:embed="R177492fcc5904597"/>
+          <a:blip xmlns:r="http://schemas.openxmlformats.org/officeDocument/2006/relationships" xmlns:a="http://schemas.openxmlformats.org/drawingml/2006/main" r:embed="R3f7d983a54ce4750"/>
           <a:stretch xmlns:a="http://schemas.openxmlformats.org/drawingml/2006/main">
             <a:fillRect l="0" t="0" r="0" b="0"/>
           </a:stretch>
@@ -14298,7 +14298,7 @@
           <p:nvPr/>
         </p:nvPicPr>
         <p:blipFill>
-          <a:blip xmlns:r="http://schemas.openxmlformats.org/officeDocument/2006/relationships" xmlns:a="http://schemas.openxmlformats.org/drawingml/2006/main" r:embed="R91d30c244e3747ab"/>
+          <a:blip xmlns:r="http://schemas.openxmlformats.org/officeDocument/2006/relationships" xmlns:a="http://schemas.openxmlformats.org/drawingml/2006/main" r:embed="R59887e61618940ac"/>
           <a:stretch xmlns:a="http://schemas.openxmlformats.org/drawingml/2006/main">
             <a:fillRect l="0" t="0" r="0" b="0"/>
           </a:stretch>
@@ -14476,7 +14476,7 @@
           <p:nvPr/>
         </p:nvPicPr>
         <p:blipFill>
-          <a:blip xmlns:r="http://schemas.openxmlformats.org/officeDocument/2006/relationships" xmlns:a="http://schemas.openxmlformats.org/drawingml/2006/main" r:embed="Rf94df265b46846fb"/>
+          <a:blip xmlns:r="http://schemas.openxmlformats.org/officeDocument/2006/relationships" xmlns:a="http://schemas.openxmlformats.org/drawingml/2006/main" r:embed="R29e36e1a72c44024"/>
           <a:stretch xmlns:a="http://schemas.openxmlformats.org/drawingml/2006/main">
             <a:fillRect l="0" t="0" r="0" b="0"/>
           </a:stretch>
@@ -14654,7 +14654,7 @@
           <p:nvPr/>
         </p:nvPicPr>
         <p:blipFill>
-          <a:blip xmlns:r="http://schemas.openxmlformats.org/officeDocument/2006/relationships" xmlns:a="http://schemas.openxmlformats.org/drawingml/2006/main" r:embed="Rc3811bbc33104f45"/>
+          <a:blip xmlns:r="http://schemas.openxmlformats.org/officeDocument/2006/relationships" xmlns:a="http://schemas.openxmlformats.org/drawingml/2006/main" r:embed="R247e6f00c6a1470a"/>
           <a:stretch xmlns:a="http://schemas.openxmlformats.org/drawingml/2006/main">
             <a:fillRect l="0" t="0" r="0" b="0"/>
           </a:stretch>
@@ -15123,7 +15123,7 @@
           <p:nvPr/>
         </p:nvPicPr>
         <p:blipFill>
-          <a:blip xmlns:r="http://schemas.openxmlformats.org/officeDocument/2006/relationships" xmlns:a="http://schemas.openxmlformats.org/drawingml/2006/main" r:embed="R517acacdc6a546ca"/>
+          <a:blip xmlns:r="http://schemas.openxmlformats.org/officeDocument/2006/relationships" xmlns:a="http://schemas.openxmlformats.org/drawingml/2006/main" r:embed="R3c77b726acb94434"/>
           <a:stretch xmlns:a="http://schemas.openxmlformats.org/drawingml/2006/main">
             <a:fillRect l="0" t="0" r="0" b="0"/>
           </a:stretch>
@@ -15301,7 +15301,7 @@
           <p:nvPr/>
         </p:nvPicPr>
         <p:blipFill>
-          <a:blip xmlns:r="http://schemas.openxmlformats.org/officeDocument/2006/relationships" xmlns:a="http://schemas.openxmlformats.org/drawingml/2006/main" r:embed="R0a3c38544014426d"/>
+          <a:blip xmlns:r="http://schemas.openxmlformats.org/officeDocument/2006/relationships" xmlns:a="http://schemas.openxmlformats.org/drawingml/2006/main" r:embed="Rd45d0465f11144c8"/>
           <a:stretch xmlns:a="http://schemas.openxmlformats.org/drawingml/2006/main">
             <a:fillRect l="0" t="0" r="0" b="0"/>
           </a:stretch>
@@ -15479,7 +15479,7 @@
           <p:nvPr/>
         </p:nvPicPr>
         <p:blipFill>
-          <a:blip xmlns:r="http://schemas.openxmlformats.org/officeDocument/2006/relationships" xmlns:a="http://schemas.openxmlformats.org/drawingml/2006/main" r:embed="R059eb056799e4a58"/>
+          <a:blip xmlns:r="http://schemas.openxmlformats.org/officeDocument/2006/relationships" xmlns:a="http://schemas.openxmlformats.org/drawingml/2006/main" r:embed="R71878dbd7cac4dea"/>
           <a:stretch xmlns:a="http://schemas.openxmlformats.org/drawingml/2006/main">
             <a:fillRect l="0" t="0" r="0" b="0"/>
           </a:stretch>
@@ -16468,7 +16468,7 @@
                 <a:ea typeface="Arial"/>
                 <a:cs typeface="Arial"/>
               </a:rPr>
-              <a:t>PROMPT  ·  TEST 25 OR FULL DRIVE INDEX</a:t>
+              <a:t>PROMPT · TEST 25 = SETUP · FULL DRIVE = HOMEWORK</a:t>
             </a:r>
             <a:endParaRPr sz="3000"/>
           </a:p>
@@ -16522,7 +16522,7 @@
                 <a:ea typeface="Arial"/>
                 <a:cs typeface="Arial"/>
               </a:rPr>
-              <a:t>Metadata only. Use stable item IDs, batch ≤25, checkpoint every batch, and resume full mode until each supported scope has no next page. Save CSV + summary + cursor. Change nothing in Drive.</a:t>
+              <a:t>Metadata only. Use stable item IDs, batch ≤25 and checkpoint every batch. FULL DRIVE continues until each supported scope has no next page. TEST 25 proves setup only. Save CSV + summary + final cursor. Change nothing in Drive.</a:t>
             </a:r>
             <a:endParaRPr sz="1700"/>
           </a:p>
@@ -16809,7 +16809,7 @@
           <p:nvPr/>
         </p:nvPicPr>
         <p:blipFill>
-          <a:blip xmlns:r="http://schemas.openxmlformats.org/officeDocument/2006/relationships" xmlns:a="http://schemas.openxmlformats.org/drawingml/2006/main" r:embed="R5127fa113e85448c"/>
+          <a:blip xmlns:r="http://schemas.openxmlformats.org/officeDocument/2006/relationships" xmlns:a="http://schemas.openxmlformats.org/drawingml/2006/main" r:embed="Re1f3f14612f84adf"/>
           <a:stretch xmlns:a="http://schemas.openxmlformats.org/drawingml/2006/main">
             <a:fillRect l="0" t="0" r="0" b="0"/>
           </a:stretch>
@@ -16997,7 +16997,7 @@
           <p:nvPr/>
         </p:nvPicPr>
         <p:blipFill>
-          <a:blip xmlns:r="http://schemas.openxmlformats.org/officeDocument/2006/relationships" xmlns:a="http://schemas.openxmlformats.org/drawingml/2006/main" r:embed="R7cb1257b306047bf"/>
+          <a:blip xmlns:r="http://schemas.openxmlformats.org/officeDocument/2006/relationships" xmlns:a="http://schemas.openxmlformats.org/drawingml/2006/main" r:embed="R3fe023c4fd434eba"/>
           <a:stretch xmlns:a="http://schemas.openxmlformats.org/drawingml/2006/main">
             <a:fillRect l="0" t="0" r="0" b="0"/>
           </a:stretch>
@@ -17185,7 +17185,7 @@
           <p:nvPr/>
         </p:nvPicPr>
         <p:blipFill>
-          <a:blip xmlns:r="http://schemas.openxmlformats.org/officeDocument/2006/relationships" xmlns:a="http://schemas.openxmlformats.org/drawingml/2006/main" r:embed="Rbb16f3cace484d10"/>
+          <a:blip xmlns:r="http://schemas.openxmlformats.org/officeDocument/2006/relationships" xmlns:a="http://schemas.openxmlformats.org/drawingml/2006/main" r:embed="Rbd470ae6d56747bd"/>
           <a:stretch xmlns:a="http://schemas.openxmlformats.org/drawingml/2006/main">
             <a:fillRect l="0" t="0" r="0" b="0"/>
           </a:stretch>
@@ -17601,7 +17601,7 @@
                 <a:ea typeface="Arial"/>
                 <a:cs typeface="Arial"/>
               </a:rPr>
-              <a:t>COMPULSORY HOMEWORK</a:t>
+              <a:t>THREE-WORKER GO-LIVE CHECK</a:t>
             </a:r>
             <a:endParaRPr sz="1050"/>
           </a:p>
@@ -17650,7 +17650,7 @@
                 <a:ea typeface="Arial"/>
                 <a:cs typeface="Arial"/>
               </a:rPr>
-              <a:t>Build two workers. Bring both reports.</a:t>
+              <a:t>Two required. One optional. Show the proof.</a:t>
             </a:r>
             <a:endParaRPr sz="3300"/>
           </a:p>
@@ -17777,7 +17777,7 @@
                 <a:ea typeface="Arial"/>
                 <a:cs typeface="Arial"/>
               </a:rPr>
-              <a:t>Choose time → pilot → daily brief. Approve brief-only or safe filing. Permanent Gmail filters stay human-reviewed.</a:t>
+              <a:t>LIVE: approved Gmail + time zone + pilot + mode + automation + validator.</a:t>
             </a:r>
             <a:endParaRPr sz="1450"/>
           </a:p>
@@ -17904,7 +17904,7 @@
                 <a:ea typeface="Arial"/>
                 <a:cs typeface="Arial"/>
               </a:rPr>
-              <a:t>Choose TEST 25 or full metadata index. Every batch ≤25 → CSV + cursor. No file content opened or changed.</a:t>
+              <a:t>LIVE: FULL DRIVE INDEX ends every supported scope in ≤25 batches → CSV + final cursor + validator. TEST 25 = setup only.</a:t>
             </a:r>
             <a:endParaRPr sz="1450"/>
           </a:p>
@@ -18031,7 +18031,7 @@
                 <a:ea typeface="Arial"/>
                 <a:cs typeface="Arial"/>
               </a:rPr>
-              <a:t>@Computer: local project only. Then Computer + Chrome stop. YOUR TURN ON LINKEDIN. You copy ≤25, close LinkedIn and return.</a:t>
+              <a:t>OPTIONAL LIVE: schedule + local @Computer proof + YOUR TURN ON LINKEDIN + manual ≤25 pilot + queue. Human sends.</a:t>
             </a:r>
             <a:endParaRPr sz="1450"/>
           </a:p>
@@ -18077,7 +18077,7 @@
                 <a:ea typeface="Arial"/>
                 <a:cs typeface="Arial"/>
               </a:rPr>
-              <a:t>DONE MEANS VISIBLE PROOF</a:t>
+              <a:t>AVAILABLE IN KIT ≠ LIVE FOR YOU</a:t>
             </a:r>
             <a:endParaRPr sz="900"/>
           </a:p>
@@ -18204,7 +18204,7 @@
                 <a:ea typeface="Arial"/>
                 <a:cs typeface="Arial"/>
               </a:rPr>
-              <a:t>Daily brief active</a:t>
+              <a:t>Required · schedule proven</a:t>
             </a:r>
             <a:endParaRPr sz="1150"/>
           </a:p>
@@ -18331,7 +18331,7 @@
                 <a:ea typeface="Arial"/>
                 <a:cs typeface="Arial"/>
               </a:rPr>
-              <a:t>Metadata only</a:t>
+              <a:t>Required · full index proven</a:t>
             </a:r>
             <a:endParaRPr sz="1150"/>
           </a:p>
@@ -18458,7 +18458,7 @@
                 <a:ea typeface="Arial"/>
                 <a:cs typeface="Arial"/>
               </a:rPr>
-              <a:t>Human LinkedIn</a:t>
+              <a:t>Optional · live or declined</a:t>
             </a:r>
             <a:endParaRPr sz="1150"/>
           </a:p>
@@ -18762,7 +18762,7 @@
           <p:nvPr/>
         </p:nvPicPr>
         <p:blipFill>
-          <a:blip xmlns:r="http://schemas.openxmlformats.org/officeDocument/2006/relationships" xmlns:a="http://schemas.openxmlformats.org/drawingml/2006/main" r:embed="R335f9576922e4502"/>
+          <a:blip xmlns:r="http://schemas.openxmlformats.org/officeDocument/2006/relationships" xmlns:a="http://schemas.openxmlformats.org/drawingml/2006/main" r:embed="R5850f6beadbb472c"/>
           <a:stretch xmlns:a="http://schemas.openxmlformats.org/drawingml/2006/main">
             <a:fillRect l="0" t="0" r="0" b="0"/>
           </a:stretch>
@@ -23128,7 +23128,7 @@
           <p:nvPr/>
         </p:nvPicPr>
         <p:blipFill>
-          <a:blip xmlns:r="http://schemas.openxmlformats.org/officeDocument/2006/relationships" xmlns:a="http://schemas.openxmlformats.org/drawingml/2006/main" r:embed="Ree9428b46aa04ece"/>
+          <a:blip xmlns:r="http://schemas.openxmlformats.org/officeDocument/2006/relationships" xmlns:a="http://schemas.openxmlformats.org/drawingml/2006/main" r:embed="R84b31c00f9794be2"/>
           <a:stretch xmlns:a="http://schemas.openxmlformats.org/drawingml/2006/main">
             <a:fillRect l="0" t="0" r="0" b="0"/>
           </a:stretch>
@@ -23306,7 +23306,7 @@
           <p:nvPr/>
         </p:nvPicPr>
         <p:blipFill>
-          <a:blip xmlns:r="http://schemas.openxmlformats.org/officeDocument/2006/relationships" xmlns:a="http://schemas.openxmlformats.org/drawingml/2006/main" r:embed="Rf477d051c8cd4cd4"/>
+          <a:blip xmlns:r="http://schemas.openxmlformats.org/officeDocument/2006/relationships" xmlns:a="http://schemas.openxmlformats.org/drawingml/2006/main" r:embed="R0262a47f46774342"/>
           <a:stretch xmlns:a="http://schemas.openxmlformats.org/drawingml/2006/main">
             <a:fillRect l="0" t="0" r="0" b="0"/>
           </a:stretch>
@@ -23484,7 +23484,7 @@
           <p:nvPr/>
         </p:nvPicPr>
         <p:blipFill>
-          <a:blip xmlns:r="http://schemas.openxmlformats.org/officeDocument/2006/relationships" xmlns:a="http://schemas.openxmlformats.org/drawingml/2006/main" r:embed="R6c7fd6e570904215"/>
+          <a:blip xmlns:r="http://schemas.openxmlformats.org/officeDocument/2006/relationships" xmlns:a="http://schemas.openxmlformats.org/drawingml/2006/main" r:embed="Ra7e50b4c619a4005"/>
           <a:stretch xmlns:a="http://schemas.openxmlformats.org/drawingml/2006/main">
             <a:fillRect l="0" t="0" r="0" b="0"/>
           </a:stretch>
@@ -23953,7 +23953,7 @@
           <p:nvPr/>
         </p:nvPicPr>
         <p:blipFill>
-          <a:blip xmlns:r="http://schemas.openxmlformats.org/officeDocument/2006/relationships" xmlns:a="http://schemas.openxmlformats.org/drawingml/2006/main" r:embed="R4c7c6cd36f3e4024"/>
+          <a:blip xmlns:r="http://schemas.openxmlformats.org/officeDocument/2006/relationships" xmlns:a="http://schemas.openxmlformats.org/drawingml/2006/main" r:embed="R04242b68fb8443f0"/>
           <a:stretch xmlns:a="http://schemas.openxmlformats.org/drawingml/2006/main">
             <a:fillRect l="0" t="0" r="0" b="0"/>
           </a:stretch>
@@ -24131,7 +24131,7 @@
           <p:nvPr/>
         </p:nvPicPr>
         <p:blipFill>
-          <a:blip xmlns:r="http://schemas.openxmlformats.org/officeDocument/2006/relationships" xmlns:a="http://schemas.openxmlformats.org/drawingml/2006/main" r:embed="R9aea4e152c3742bb"/>
+          <a:blip xmlns:r="http://schemas.openxmlformats.org/officeDocument/2006/relationships" xmlns:a="http://schemas.openxmlformats.org/drawingml/2006/main" r:embed="R768d8c680dc14e2f"/>
           <a:stretch xmlns:a="http://schemas.openxmlformats.org/drawingml/2006/main">
             <a:fillRect l="0" t="0" r="0" b="0"/>
           </a:stretch>
@@ -24309,7 +24309,7 @@
           <p:nvPr/>
         </p:nvPicPr>
         <p:blipFill>
-          <a:blip xmlns:r="http://schemas.openxmlformats.org/officeDocument/2006/relationships" xmlns:a="http://schemas.openxmlformats.org/drawingml/2006/main" r:embed="R37d984697553422d"/>
+          <a:blip xmlns:r="http://schemas.openxmlformats.org/officeDocument/2006/relationships" xmlns:a="http://schemas.openxmlformats.org/drawingml/2006/main" r:embed="Rcc3572c77b2d44f5"/>
           <a:stretch xmlns:a="http://schemas.openxmlformats.org/drawingml/2006/main">
             <a:fillRect l="0" t="0" r="0" b="0"/>
           </a:stretch>
